--- a/classes/parte-0-fundamentos-y-prerrequisitos/012-dns-dhcp-y-arp-funcionamiento-y-riesgos/clase-012-presentacion.pptx
+++ b/classes/parte-0-fundamentos-y-prerrequisitos/012-dns-dhcp-y-arp-funcionamiento-y-riesgos/clase-012-presentacion.pptx
@@ -17,6 +17,10 @@
     <p:sldId id="265" r:id="rId16"/>
     <p:sldId id="266" r:id="rId17"/>
     <p:sldId id="267" r:id="rId18"/>
+    <p:sldId id="268" r:id="rId19"/>
+    <p:sldId id="269" r:id="rId20"/>
+    <p:sldId id="270" r:id="rId21"/>
+    <p:sldId id="271" r:id="rId22"/>
   </p:sldIdLst>
   <p:sldSz cx="9144000" cy="6858000" type="screen4x3"/>
   <p:notesSz cx="6858000" cy="9144000"/>
@@ -3198,7 +3202,7 @@
                   <a:srgbClr val="0B3D2E"/>
                 </a:solidFill>
               </a:rPr>
-              <a:t>⚠️ Errores comunes</a:t>
+              <a:t>✍️ Ejercicios</a:t>
             </a:r>
           </a:p>
         </p:txBody>
@@ -3236,67 +3240,97 @@
                   <a:srgbClr val="22282E"/>
                 </a:solidFill>
               </a:rPr>
-              <a:t>•  El ARP spoofing corta la conexión de la víctima — No habilitaste ipforward. Actívalo para reenviar el tráfico.</a:t>
-            </a:r>
-          </a:p>
-          <a:p>
-            <a:pPr>
-              <a:spcAft>
-                <a:spcPts val="600"/>
-              </a:spcAft>
-            </a:pPr>
-            <a:r>
-              <a:rPr sz="1500">
-                <a:solidFill>
-                  <a:srgbClr val="22282E"/>
-                </a:solidFill>
-              </a:rPr>
-              <a:t>•  dig devuelve SERVFAIL — Resolver mal configurado o DNSSEC fallando. Prueba otro servidor con @.</a:t>
-            </a:r>
-          </a:p>
-          <a:p>
-            <a:pPr>
-              <a:spcAft>
-                <a:spcPts val="600"/>
-              </a:spcAft>
-            </a:pPr>
-            <a:r>
-              <a:rPr sz="1500">
-                <a:solidFill>
-                  <a:srgbClr val="22282E"/>
-                </a:solidFill>
-              </a:rPr>
-              <a:t>•  La víctima no cae en el spoofing — Tiene ARP estático o DAI. Es la defensa funcionando.</a:t>
-            </a:r>
-          </a:p>
-          <a:p>
-            <a:pPr>
-              <a:spcAft>
-                <a:spcPts val="600"/>
-              </a:spcAft>
-            </a:pPr>
-            <a:r>
-              <a:rPr sz="1500">
-                <a:solidFill>
-                  <a:srgbClr val="22282E"/>
-                </a:solidFill>
-              </a:rPr>
-              <a:t>•  No veo los 4 mensajes DHCP — La concesión aún es válida; fuerza dhclient -r y renueva.</a:t>
-            </a:r>
-          </a:p>
-          <a:p>
-            <a:pPr>
-              <a:spcAft>
-                <a:spcPts val="600"/>
-              </a:spcAft>
-            </a:pPr>
-            <a:r>
-              <a:rPr sz="1500">
-                <a:solidFill>
-                  <a:srgbClr val="22282E"/>
-                </a:solidFill>
-              </a:rPr>
-              <a:t>•  DNS spoofing no redirige — La víctima usa DoH/DoT o caché. Considera el cifrado del canal DNS.</a:t>
+              <a:t>•  Explica paso a paso qué ocurre desde que escribes un dominio hasta que recibes su IP, nombrando cada servidor implicado.</a:t>
+            </a:r>
+          </a:p>
+          <a:p>
+            <a:pPr>
+              <a:spcAft>
+                <a:spcPts val="600"/>
+              </a:spcAft>
+            </a:pPr>
+            <a:r>
+              <a:rPr sz="1500">
+                <a:solidFill>
+                  <a:srgbClr val="22282E"/>
+                </a:solidFill>
+              </a:rPr>
+              <a:t>•  Da un ejemplo de uso real de cada registro: A, MX, TXT, CNAME y NS.</a:t>
+            </a:r>
+          </a:p>
+          <a:p>
+            <a:pPr>
+              <a:spcAft>
+                <a:spcPts val="600"/>
+              </a:spcAft>
+            </a:pPr>
+            <a:r>
+              <a:rPr sz="1500">
+                <a:solidFill>
+                  <a:srgbClr val="22282E"/>
+                </a:solidFill>
+              </a:rPr>
+              <a:t>•  Describe cómo un servidor DHCP rogue puede convertirse en el gateway efectivo de las víctimas.</a:t>
+            </a:r>
+          </a:p>
+          <a:p>
+            <a:pPr>
+              <a:spcAft>
+                <a:spcPts val="600"/>
+              </a:spcAft>
+            </a:pPr>
+            <a:r>
+              <a:rPr sz="1500">
+                <a:solidFill>
+                  <a:srgbClr val="22282E"/>
+                </a:solidFill>
+              </a:rPr>
+              <a:t>•  ¿Por qué ARP es tan fácil de falsificar? ¿Qué propiedad de seguridad le falta al protocolo?</a:t>
+            </a:r>
+          </a:p>
+          <a:p>
+            <a:pPr>
+              <a:spcAft>
+                <a:spcPts val="600"/>
+              </a:spcAft>
+            </a:pPr>
+            <a:r>
+              <a:rPr sz="1500">
+                <a:solidFill>
+                  <a:srgbClr val="22282E"/>
+                </a:solidFill>
+              </a:rPr>
+              <a:t>•  Investiga DHCP snooping y Dynamic ARP Inspection e indica qué ataque concreto frena cada uno.</a:t>
+            </a:r>
+          </a:p>
+          <a:p>
+            <a:pPr>
+              <a:spcAft>
+                <a:spcPts val="600"/>
+              </a:spcAft>
+            </a:pPr>
+            <a:r>
+              <a:rPr sz="1500">
+                <a:solidFill>
+                  <a:srgbClr val="22282E"/>
+                </a:solidFill>
+              </a:rPr>
+              <a:t>•  Explica qué protege DNSSEC y qué no protege, y compáralo con lo que aportan DoH/DoT.</a:t>
+            </a:r>
+          </a:p>
+          <a:p>
+            <a:pPr>
+              <a:spcAft>
+                <a:spcPts val="600"/>
+              </a:spcAft>
+            </a:pPr>
+            <a:r>
+              <a:rPr sz="1500">
+                <a:solidFill>
+                  <a:srgbClr val="22282E"/>
+                </a:solidFill>
+              </a:rPr>
+              <a:t>•  Propón un método para detectar automáticamente ARP spoofing observando la caché ARP en el tiempo.</a:t>
             </a:r>
           </a:p>
         </p:txBody>
@@ -3347,7 +3381,7 @@
                   <a:srgbClr val="0B3D2E"/>
                 </a:solidFill>
               </a:rPr>
-              <a:t>❓ Preguntas frecuentes</a:t>
+              <a:t>📝 Reto verificable</a:t>
             </a:r>
           </a:p>
         </p:txBody>
@@ -3385,52 +3419,22 @@
                   <a:srgbClr val="22282E"/>
                 </a:solidFill>
               </a:rPr>
-              <a:t>•  ❓ ¿Por qué estos protocolos no tienen autenticación? Se diseñaron en los años 80 para redes confiables. Añadir seguridad después (DNSSEC, DAI) es más difícil que haberla incluido de origen; es una lección de diseño.</a:t>
-            </a:r>
-          </a:p>
-          <a:p>
-            <a:pPr>
-              <a:spcAft>
-                <a:spcPts val="600"/>
-              </a:spcAft>
-            </a:pPr>
-            <a:r>
-              <a:rPr sz="1500">
-                <a:solidFill>
-                  <a:srgbClr val="22282E"/>
-                </a:solidFill>
-              </a:rPr>
-              <a:t>•  ❓ ¿DNS over HTTPS (DoH) resuelve todo? Añade confidencialidad e integridad del canal cliente-resolver, dificultando el spoofing y la vigilancia, pero no autentica la zona como DNSSEC ni protege dentro de la LAN por sí solo.</a:t>
-            </a:r>
-          </a:p>
-          <a:p>
-            <a:pPr>
-              <a:spcAft>
-                <a:spcPts val="600"/>
-              </a:spcAft>
-            </a:pPr>
-            <a:r>
-              <a:rPr sz="1500">
-                <a:solidFill>
-                  <a:srgbClr val="22282E"/>
-                </a:solidFill>
-              </a:rPr>
-              <a:t>•  ❓ ¿ARP spoofing funciona en redes conmutadas modernas? Sí, porque explota la ausencia de autenticación de ARP, no el medio. Las mitigaciones son a nivel de switch (DAI) y segmentación.</a:t>
-            </a:r>
-          </a:p>
-          <a:p>
-            <a:pPr>
-              <a:spcAft>
-                <a:spcPts val="600"/>
-              </a:spcAft>
-            </a:pPr>
-            <a:r>
-              <a:rPr sz="1500">
-                <a:solidFill>
-                  <a:srgbClr val="22282E"/>
-                </a:solidFill>
-              </a:rPr>
-              <a:t>•  ❓ ¿Cómo detecto un servidor DHCP rogue? Monitorizando ofertas DHCP inesperadas y con DHCP snooping en switches, que solo confía en puertos autorizados.</a:t>
+              <a:t>•  Monta en tu laboratorio un ataque de ARP spoofing entre dos VMs y demuéstralo con evidencia: captura la tabla ARP de la víctima antes y después del ataque, y muestra en Wireshark tráfico de la…</a:t>
+            </a:r>
+          </a:p>
+          <a:p>
+            <a:pPr>
+              <a:spcAft>
+                <a:spcPts val="600"/>
+              </a:spcAft>
+            </a:pPr>
+            <a:r>
+              <a:rPr sz="1500">
+                <a:solidFill>
+                  <a:srgbClr val="22282E"/>
+                </a:solidFill>
+              </a:rPr>
+              <a:t>•  Criterio de aceptación: la tabla ARP de la víctima muestra la MAC del atacante asociada a la IP del gateway tras el ataque, y existe una captura que evidencia el tráfico interceptado. La sección de…</a:t>
             </a:r>
           </a:p>
         </p:txBody>
@@ -3481,7 +3485,7 @@
                   <a:srgbClr val="0B3D2E"/>
                 </a:solidFill>
               </a:rPr>
-              <a:t>🔗 Referencias</a:t>
+              <a:t>⚠️ Errores comunes</a:t>
             </a:r>
           </a:p>
         </p:txBody>
@@ -3519,56 +3523,519 @@
                   <a:srgbClr val="22282E"/>
                 </a:solidFill>
               </a:rPr>
-              <a:t>•  RFC 1035 (DNS) — &lt;https://www.rfc-editor.org/rfc/rfc1035&gt;</a:t>
-            </a:r>
-          </a:p>
-          <a:p>
-            <a:pPr>
-              <a:spcAft>
-                <a:spcPts val="600"/>
-              </a:spcAft>
-            </a:pPr>
-            <a:r>
-              <a:rPr sz="1500">
-                <a:solidFill>
-                  <a:srgbClr val="22282E"/>
-                </a:solidFill>
-              </a:rPr>
-              <a:t>•  RFC 2131 (DHCP) — &lt;https://www.rfc-editor.org/rfc/rfc2131&gt;</a:t>
-            </a:r>
-          </a:p>
-          <a:p>
-            <a:pPr>
-              <a:spcAft>
-                <a:spcPts val="600"/>
-              </a:spcAft>
-            </a:pPr>
-            <a:r>
-              <a:rPr sz="1500">
-                <a:solidFill>
-                  <a:srgbClr val="22282E"/>
-                </a:solidFill>
-              </a:rPr>
-              <a:t>•  RFC 826 (ARP) — &lt;https://www.rfc-editor.org/rfc/rfc826&gt;</a:t>
-            </a:r>
-          </a:p>
-          <a:p>
-            <a:pPr>
-              <a:spcAft>
-                <a:spcPts val="600"/>
-              </a:spcAft>
-            </a:pPr>
-            <a:r>
-              <a:rPr sz="1500">
-                <a:solidFill>
-                  <a:srgbClr val="22282E"/>
-                </a:solidFill>
-              </a:rPr>
-              <a:t>•  Cloudflare Learning: DNS — &lt;https://www.cloudflare.com/learning/dns/what-is-dns/&gt;</a:t>
-            </a:r>
-          </a:p>
-        </p:txBody>
-      </p:sp>
+              <a:t>•  El ARP spoofing corta la conexión de la víctima — No habilitaste ipforward. Actívalo para reenviar el tráfico y mantener el MITM transparente.</a:t>
+            </a:r>
+          </a:p>
+          <a:p>
+            <a:pPr>
+              <a:spcAft>
+                <a:spcPts val="600"/>
+              </a:spcAft>
+            </a:pPr>
+            <a:r>
+              <a:rPr sz="1500">
+                <a:solidFill>
+                  <a:srgbClr val="22282E"/>
+                </a:solidFill>
+              </a:rPr>
+              <a:t>•  dig devuelve SERVFAIL — Resolver mal configurado o fallo de validación DNSSEC. Prueba otro servidor con @8.8.8.8.</a:t>
+            </a:r>
+          </a:p>
+          <a:p>
+            <a:pPr>
+              <a:spcAft>
+                <a:spcPts val="600"/>
+              </a:spcAft>
+            </a:pPr>
+            <a:r>
+              <a:rPr sz="1500">
+                <a:solidFill>
+                  <a:srgbClr val="22282E"/>
+                </a:solidFill>
+              </a:rPr>
+              <a:t>•  La víctima no cae en el spoofing — Tiene ARP estático o DAI activo. Es exactamente la defensa funcionando.</a:t>
+            </a:r>
+          </a:p>
+          <a:p>
+            <a:pPr>
+              <a:spcAft>
+                <a:spcPts val="600"/>
+              </a:spcAft>
+            </a:pPr>
+            <a:r>
+              <a:rPr sz="1500">
+                <a:solidFill>
+                  <a:srgbClr val="22282E"/>
+                </a:solidFill>
+              </a:rPr>
+              <a:t>•  No veo los cuatro mensajes DHCP — La concesión aún es válida. Fuérzalo con dhclient -r y renueva.</a:t>
+            </a:r>
+          </a:p>
+          <a:p>
+            <a:pPr>
+              <a:spcAft>
+                <a:spcPts val="600"/>
+              </a:spcAft>
+            </a:pPr>
+            <a:r>
+              <a:rPr sz="1500">
+                <a:solidFill>
+                  <a:srgbClr val="22282E"/>
+                </a:solidFill>
+              </a:rPr>
+              <a:t>•  DNS spoofing no redirige — La víctima usa DoH/DoT o tiene la respuesta en caché. Considera el cifrado del canal y el TTL.</a:t>
+            </a:r>
+          </a:p>
+          <a:p>
+            <a:pPr>
+              <a:spcAft>
+                <a:spcPts val="600"/>
+              </a:spcAft>
+            </a:pPr>
+            <a:r>
+              <a:rPr sz="1500">
+                <a:solidFill>
+                  <a:srgbClr val="22282E"/>
+                </a:solidFill>
+              </a:rPr>
+              <a:t>•  La caché ARP no muestra la MAC esperada — Aún no hubo tráfico hacia esa IP. Genera un ping para poblar la entrada.</a:t>
+            </a:r>
+          </a:p>
+        </p:txBody>
+      </p:sp>
+    </p:spTree>
+  </p:cSld>
+  <p:clrMapOvr>
+    <a:masterClrMapping/>
+  </p:clrMapOvr>
+</p:sld>
+</file>
+
+<file path=ppt/slides/slide13.xml><?xml version="1.0" encoding="utf-8"?>
+<p:sld xmlns:a="http://schemas.openxmlformats.org/drawingml/2006/main" xmlns:p="http://schemas.openxmlformats.org/presentationml/2006/main" xmlns:r="http://schemas.openxmlformats.org/officeDocument/2006/relationships">
+  <p:cSld>
+    <p:spTree>
+      <p:nvGrpSpPr>
+        <p:cNvPr id="1" name=""/>
+        <p:cNvGrpSpPr/>
+        <p:nvPr/>
+      </p:nvGrpSpPr>
+      <p:grpSpPr/>
+      <p:sp>
+        <p:nvSpPr>
+          <p:cNvPr id="2" name="TextBox 1"/>
+          <p:cNvSpPr txBox="1"/>
+          <p:nvPr/>
+        </p:nvSpPr>
+        <p:spPr>
+          <a:xfrm>
+            <a:off x="457200" y="320040"/>
+            <a:ext cx="8229600" cy="822960"/>
+          </a:xfrm>
+          <a:prstGeom prst="rect">
+            <a:avLst/>
+          </a:prstGeom>
+          <a:noFill/>
+        </p:spPr>
+        <p:txBody>
+          <a:bodyPr wrap="square">
+            <a:spAutoFit/>
+          </a:bodyPr>
+          <a:lstStyle/>
+          <a:p>
+            <a:r>
+              <a:rPr sz="2600" b="1">
+                <a:solidFill>
+                  <a:srgbClr val="0B3D2E"/>
+                </a:solidFill>
+              </a:rPr>
+              <a:t>❓ Preguntas frecuentes</a:t>
+            </a:r>
+          </a:p>
+        </p:txBody>
+      </p:sp>
+      <p:sp>
+        <p:nvSpPr>
+          <p:cNvPr id="3" name="TextBox 2"/>
+          <p:cNvSpPr txBox="1"/>
+          <p:nvPr/>
+        </p:nvSpPr>
+        <p:spPr>
+          <a:xfrm>
+            <a:off x="457200" y="1280160"/>
+            <a:ext cx="8229600" cy="4937760"/>
+          </a:xfrm>
+          <a:prstGeom prst="rect">
+            <a:avLst/>
+          </a:prstGeom>
+          <a:noFill/>
+        </p:spPr>
+        <p:txBody>
+          <a:bodyPr wrap="square">
+            <a:spAutoFit/>
+          </a:bodyPr>
+          <a:lstStyle/>
+          <a:p>
+            <a:pPr>
+              <a:spcAft>
+                <a:spcPts val="600"/>
+              </a:spcAft>
+            </a:pPr>
+            <a:r>
+              <a:rPr sz="1500">
+                <a:solidFill>
+                  <a:srgbClr val="22282E"/>
+                </a:solidFill>
+              </a:rPr>
+              <a:t>•  ❓ ¿Por qué estos protocolos no tienen autenticación? Se diseñaron en los años 80 para redes confiables. Añadir seguridad después (DNSSEC, DAI) es más difícil que haberla incluido de origen; es una…</a:t>
+            </a:r>
+          </a:p>
+          <a:p>
+            <a:pPr>
+              <a:spcAft>
+                <a:spcPts val="600"/>
+              </a:spcAft>
+            </a:pPr>
+            <a:r>
+              <a:rPr sz="1500">
+                <a:solidFill>
+                  <a:srgbClr val="22282E"/>
+                </a:solidFill>
+              </a:rPr>
+              <a:t>•  ❓ ¿DNS over HTTPS (DoH) lo resuelve todo? Añade confidencialidad e integridad del canal entre cliente y resolver, dificultando el spoofing y la vigilancia, pero no autentica la zona como DNSSEC ni…</a:t>
+            </a:r>
+          </a:p>
+          <a:p>
+            <a:pPr>
+              <a:spcAft>
+                <a:spcPts val="600"/>
+              </a:spcAft>
+            </a:pPr>
+            <a:r>
+              <a:rPr sz="1500">
+                <a:solidFill>
+                  <a:srgbClr val="22282E"/>
+                </a:solidFill>
+              </a:rPr>
+              <a:t>•  ❓ ¿ARP spoofing funciona en redes conmutadas modernas? Sí, porque explota la ausencia de autenticación del protocolo, no el medio físico. Las mitigaciones son a nivel de switch (DAI) y mediante…</a:t>
+            </a:r>
+          </a:p>
+          <a:p>
+            <a:pPr>
+              <a:spcAft>
+                <a:spcPts val="600"/>
+              </a:spcAft>
+            </a:pPr>
+            <a:r>
+              <a:rPr sz="1500">
+                <a:solidFill>
+                  <a:srgbClr val="22282E"/>
+                </a:solidFill>
+              </a:rPr>
+              <a:t>•  ❓ ¿Cómo detecto un servidor DHCP rogue? Monitorizando ofertas DHCP inesperadas en la red y activando DHCP snooping en los switches, que solo confía en los puertos autorizados a servir DHCP.</a:t>
+            </a:r>
+          </a:p>
+        </p:txBody>
+      </p:sp>
+    </p:spTree>
+  </p:cSld>
+  <p:clrMapOvr>
+    <a:masterClrMapping/>
+  </p:clrMapOvr>
+</p:sld>
+</file>
+
+<file path=ppt/slides/slide14.xml><?xml version="1.0" encoding="utf-8"?>
+<p:sld xmlns:a="http://schemas.openxmlformats.org/drawingml/2006/main" xmlns:p="http://schemas.openxmlformats.org/presentationml/2006/main" xmlns:r="http://schemas.openxmlformats.org/officeDocument/2006/relationships">
+  <p:cSld>
+    <p:spTree>
+      <p:nvGrpSpPr>
+        <p:cNvPr id="1" name=""/>
+        <p:cNvGrpSpPr/>
+        <p:nvPr/>
+      </p:nvGrpSpPr>
+      <p:grpSpPr/>
+      <p:sp>
+        <p:nvSpPr>
+          <p:cNvPr id="2" name="TextBox 1"/>
+          <p:cNvSpPr txBox="1"/>
+          <p:nvPr/>
+        </p:nvSpPr>
+        <p:spPr>
+          <a:xfrm>
+            <a:off x="457200" y="320040"/>
+            <a:ext cx="8229600" cy="822960"/>
+          </a:xfrm>
+          <a:prstGeom prst="rect">
+            <a:avLst/>
+          </a:prstGeom>
+          <a:noFill/>
+        </p:spPr>
+        <p:txBody>
+          <a:bodyPr wrap="square">
+            <a:spAutoFit/>
+          </a:bodyPr>
+          <a:lstStyle/>
+          <a:p>
+            <a:r>
+              <a:rPr sz="2600" b="1">
+                <a:solidFill>
+                  <a:srgbClr val="0B3D2E"/>
+                </a:solidFill>
+              </a:rPr>
+              <a:t>🔗 Referencias</a:t>
+            </a:r>
+          </a:p>
+        </p:txBody>
+      </p:sp>
+      <p:sp>
+        <p:nvSpPr>
+          <p:cNvPr id="3" name="TextBox 2"/>
+          <p:cNvSpPr txBox="1"/>
+          <p:nvPr/>
+        </p:nvSpPr>
+        <p:spPr>
+          <a:xfrm>
+            <a:off x="457200" y="1280160"/>
+            <a:ext cx="8229600" cy="4937760"/>
+          </a:xfrm>
+          <a:prstGeom prst="rect">
+            <a:avLst/>
+          </a:prstGeom>
+          <a:noFill/>
+        </p:spPr>
+        <p:txBody>
+          <a:bodyPr wrap="square">
+            <a:spAutoFit/>
+          </a:bodyPr>
+          <a:lstStyle/>
+          <a:p>
+            <a:pPr>
+              <a:spcAft>
+                <a:spcPts val="600"/>
+              </a:spcAft>
+            </a:pPr>
+            <a:r>
+              <a:rPr sz="1500">
+                <a:solidFill>
+                  <a:srgbClr val="22282E"/>
+                </a:solidFill>
+              </a:rPr>
+              <a:t>•  RFC 1035 (Domain Names — Implementation and Specification) — &lt;https://www.rfc-editor.org/rfc/rfc1035&gt;</a:t>
+            </a:r>
+          </a:p>
+          <a:p>
+            <a:pPr>
+              <a:spcAft>
+                <a:spcPts val="600"/>
+              </a:spcAft>
+            </a:pPr>
+            <a:r>
+              <a:rPr sz="1500">
+                <a:solidFill>
+                  <a:srgbClr val="22282E"/>
+                </a:solidFill>
+              </a:rPr>
+              <a:t>•  RFC 2131 (Dynamic Host Configuration Protocol) — &lt;https://www.rfc-editor.org/rfc/rfc2131&gt;</a:t>
+            </a:r>
+          </a:p>
+          <a:p>
+            <a:pPr>
+              <a:spcAft>
+                <a:spcPts val="600"/>
+              </a:spcAft>
+            </a:pPr>
+            <a:r>
+              <a:rPr sz="1500">
+                <a:solidFill>
+                  <a:srgbClr val="22282E"/>
+                </a:solidFill>
+              </a:rPr>
+              <a:t>•  RFC 826 (Address Resolution Protocol) — &lt;https://www.rfc-editor.org/rfc/rfc826&gt;</a:t>
+            </a:r>
+          </a:p>
+          <a:p>
+            <a:pPr>
+              <a:spcAft>
+                <a:spcPts val="600"/>
+              </a:spcAft>
+            </a:pPr>
+            <a:r>
+              <a:rPr sz="1500">
+                <a:solidFill>
+                  <a:srgbClr val="22282E"/>
+                </a:solidFill>
+              </a:rPr>
+              <a:t>•  RFC 4033 (DNS Security Introduction and Requirements) — &lt;https://www.rfc-editor.org/rfc/rfc4033&gt;</a:t>
+            </a:r>
+          </a:p>
+          <a:p>
+            <a:pPr>
+              <a:spcAft>
+                <a:spcPts val="600"/>
+              </a:spcAft>
+            </a:pPr>
+            <a:r>
+              <a:rPr sz="1500">
+                <a:solidFill>
+                  <a:srgbClr val="22282E"/>
+                </a:solidFill>
+              </a:rPr>
+              <a:t>•  Cloudflare Learning: What is DNS? — &lt;https://www.cloudflare.com/learning/dns/what-is-dns/&gt;</a:t>
+            </a:r>
+          </a:p>
+        </p:txBody>
+      </p:sp>
+    </p:spTree>
+  </p:cSld>
+  <p:clrMapOvr>
+    <a:masterClrMapping/>
+  </p:clrMapOvr>
+</p:sld>
+</file>
+
+<file path=ppt/slides/slide15.xml><?xml version="1.0" encoding="utf-8"?>
+<p:sld xmlns:a="http://schemas.openxmlformats.org/drawingml/2006/main" xmlns:p="http://schemas.openxmlformats.org/presentationml/2006/main" xmlns:r="http://schemas.openxmlformats.org/officeDocument/2006/relationships">
+  <p:cSld>
+    <p:spTree>
+      <p:nvGrpSpPr>
+        <p:cNvPr id="1" name=""/>
+        <p:cNvGrpSpPr/>
+        <p:nvPr/>
+      </p:nvGrpSpPr>
+      <p:grpSpPr/>
+      <p:sp>
+        <p:nvSpPr>
+          <p:cNvPr id="2" name="TextBox 1"/>
+          <p:cNvSpPr txBox="1"/>
+          <p:nvPr/>
+        </p:nvSpPr>
+        <p:spPr>
+          <a:xfrm>
+            <a:off x="457200" y="274320"/>
+            <a:ext cx="8229600" cy="640080"/>
+          </a:xfrm>
+          <a:prstGeom prst="rect">
+            <a:avLst/>
+          </a:prstGeom>
+          <a:noFill/>
+        </p:spPr>
+        <p:txBody>
+          <a:bodyPr wrap="square">
+            <a:spAutoFit/>
+          </a:bodyPr>
+          <a:lstStyle/>
+          <a:p>
+            <a:r>
+              <a:rPr sz="2200" b="1">
+                <a:solidFill>
+                  <a:srgbClr val="0B3D2E"/>
+                </a:solidFill>
+              </a:rPr>
+              <a:t>Diagrama 1</a:t>
+            </a:r>
+          </a:p>
+        </p:txBody>
+      </p:sp>
+      <p:pic>
+        <p:nvPicPr>
+          <p:cNvPr id="3" name="Picture 2" descr="a0c962c221ee7545.png"/>
+          <p:cNvPicPr>
+            <a:picLocks noChangeAspect="1"/>
+          </p:cNvPicPr>
+          <p:nvPr/>
+        </p:nvPicPr>
+        <p:blipFill>
+          <a:blip r:embed="rId2"/>
+          <a:stretch>
+            <a:fillRect/>
+          </a:stretch>
+        </p:blipFill>
+        <p:spPr>
+          <a:xfrm>
+            <a:off x="457200" y="2523744"/>
+            <a:ext cx="8229600" cy="2450592"/>
+          </a:xfrm>
+          <a:prstGeom prst="rect">
+            <a:avLst/>
+          </a:prstGeom>
+        </p:spPr>
+      </p:pic>
+    </p:spTree>
+  </p:cSld>
+  <p:clrMapOvr>
+    <a:masterClrMapping/>
+  </p:clrMapOvr>
+</p:sld>
+</file>
+
+<file path=ppt/slides/slide16.xml><?xml version="1.0" encoding="utf-8"?>
+<p:sld xmlns:a="http://schemas.openxmlformats.org/drawingml/2006/main" xmlns:p="http://schemas.openxmlformats.org/presentationml/2006/main" xmlns:r="http://schemas.openxmlformats.org/officeDocument/2006/relationships">
+  <p:cSld>
+    <p:spTree>
+      <p:nvGrpSpPr>
+        <p:cNvPr id="1" name=""/>
+        <p:cNvGrpSpPr/>
+        <p:nvPr/>
+      </p:nvGrpSpPr>
+      <p:grpSpPr/>
+      <p:sp>
+        <p:nvSpPr>
+          <p:cNvPr id="2" name="TextBox 1"/>
+          <p:cNvSpPr txBox="1"/>
+          <p:nvPr/>
+        </p:nvSpPr>
+        <p:spPr>
+          <a:xfrm>
+            <a:off x="457200" y="274320"/>
+            <a:ext cx="8229600" cy="640080"/>
+          </a:xfrm>
+          <a:prstGeom prst="rect">
+            <a:avLst/>
+          </a:prstGeom>
+          <a:noFill/>
+        </p:spPr>
+        <p:txBody>
+          <a:bodyPr wrap="square">
+            <a:spAutoFit/>
+          </a:bodyPr>
+          <a:lstStyle/>
+          <a:p>
+            <a:r>
+              <a:rPr sz="2200" b="1">
+                <a:solidFill>
+                  <a:srgbClr val="0B3D2E"/>
+                </a:solidFill>
+              </a:rPr>
+              <a:t>Diagrama 2</a:t>
+            </a:r>
+          </a:p>
+        </p:txBody>
+      </p:sp>
+      <p:pic>
+        <p:nvPicPr>
+          <p:cNvPr id="3" name="Picture 2" descr="f085e1821eab816f.png"/>
+          <p:cNvPicPr>
+            <a:picLocks noChangeAspect="1"/>
+          </p:cNvPicPr>
+          <p:nvPr/>
+        </p:nvPicPr>
+        <p:blipFill>
+          <a:blip r:embed="rId2"/>
+          <a:stretch>
+            <a:fillRect/>
+          </a:stretch>
+        </p:blipFill>
+        <p:spPr>
+          <a:xfrm>
+            <a:off x="457200" y="1901952"/>
+            <a:ext cx="8229600" cy="3694176"/>
+          </a:xfrm>
+          <a:prstGeom prst="rect">
+            <a:avLst/>
+          </a:prstGeom>
+        </p:spPr>
+      </p:pic>
     </p:spTree>
   </p:cSld>
   <p:clrMapOvr>
@@ -3653,7 +4120,7 @@
                   <a:srgbClr val="22282E"/>
                 </a:solidFill>
               </a:rPr>
-              <a:t>•  Comprender los tres protocolos de infraestructura que hacen funcionar cualquier red local e Internet: DNS (resolución de nombres), DHCP (asignación de direcciones) y ARP (mapeo IP↔MAC). Todos comparten un problema: se diseñaron sin autenticación, lo que los convierte en vectores clásicos de ataque en red local.</a:t>
+              <a:t>•  Comprender los tres protocolos de infraestructura que hacen funcionar cualquier red local e Internet: DNS (resolución de nombres), DHCP (asignación automática de direcciones) y ARP (mapeo entre IP y…</a:t>
             </a:r>
           </a:p>
         </p:txBody>
@@ -3757,67 +4224,82 @@
                   <a:srgbClr val="22282E"/>
                 </a:solidFill>
               </a:rPr>
-              <a:t>•  Describir el proceso de resolución DNS y sus tipos de registro.</a:t>
-            </a:r>
-          </a:p>
-          <a:p>
-            <a:pPr>
-              <a:spcAft>
-                <a:spcPts val="600"/>
-              </a:spcAft>
-            </a:pPr>
-            <a:r>
-              <a:rPr sz="1500">
-                <a:solidFill>
-                  <a:srgbClr val="22282E"/>
-                </a:solidFill>
-              </a:rPr>
-              <a:t>•  Explicar el intercambio DHCP (DORA) y su ausencia de autenticación.</a:t>
-            </a:r>
-          </a:p>
-          <a:p>
-            <a:pPr>
-              <a:spcAft>
-                <a:spcPts val="600"/>
-              </a:spcAft>
-            </a:pPr>
-            <a:r>
-              <a:rPr sz="1500">
-                <a:solidFill>
-                  <a:srgbClr val="22282E"/>
-                </a:solidFill>
-              </a:rPr>
-              <a:t>•  Detallar cómo ARP resuelve MAC a partir de IP.</a:t>
-            </a:r>
-          </a:p>
-          <a:p>
-            <a:pPr>
-              <a:spcAft>
-                <a:spcPts val="600"/>
-              </a:spcAft>
-            </a:pPr>
-            <a:r>
-              <a:rPr sz="1500">
-                <a:solidFill>
-                  <a:srgbClr val="22282E"/>
-                </a:solidFill>
-              </a:rPr>
-              <a:t>•  Identificar ataques: ARP spoofing, DNS spoofing, DHCP rogue.</a:t>
-            </a:r>
-          </a:p>
-          <a:p>
-            <a:pPr>
-              <a:spcAft>
-                <a:spcPts val="600"/>
-              </a:spcAft>
-            </a:pPr>
-            <a:r>
-              <a:rPr sz="1500">
-                <a:solidFill>
-                  <a:srgbClr val="22282E"/>
-                </a:solidFill>
-              </a:rPr>
-              <a:t>•  Observar y detectar estos ataques en el laboratorio.</a:t>
+              <a:t>•  Describir el proceso de resolución DNS jerárquica y sus tipos de registro.</a:t>
+            </a:r>
+          </a:p>
+          <a:p>
+            <a:pPr>
+              <a:spcAft>
+                <a:spcPts val="600"/>
+              </a:spcAft>
+            </a:pPr>
+            <a:r>
+              <a:rPr sz="1500">
+                <a:solidFill>
+                  <a:srgbClr val="22282E"/>
+                </a:solidFill>
+              </a:rPr>
+              <a:t>•  Explicar el intercambio DHCP (DORA) y por qué su ausencia de autenticación habilita servidores rogue.</a:t>
+            </a:r>
+          </a:p>
+          <a:p>
+            <a:pPr>
+              <a:spcAft>
+                <a:spcPts val="600"/>
+              </a:spcAft>
+            </a:pPr>
+            <a:r>
+              <a:rPr sz="1500">
+                <a:solidFill>
+                  <a:srgbClr val="22282E"/>
+                </a:solidFill>
+              </a:rPr>
+              <a:t>•  Detallar cómo ARP resuelve una MAC a partir de una IP dentro del segmento local.</a:t>
+            </a:r>
+          </a:p>
+          <a:p>
+            <a:pPr>
+              <a:spcAft>
+                <a:spcPts val="600"/>
+              </a:spcAft>
+            </a:pPr>
+            <a:r>
+              <a:rPr sz="1500">
+                <a:solidFill>
+                  <a:srgbClr val="22282E"/>
+                </a:solidFill>
+              </a:rPr>
+              <a:t>•  Identificar los ataques ARP spoofing, DNS spoofing y DHCP rogue, y su relación con el MITM.</a:t>
+            </a:r>
+          </a:p>
+          <a:p>
+            <a:pPr>
+              <a:spcAft>
+                <a:spcPts val="600"/>
+              </a:spcAft>
+            </a:pPr>
+            <a:r>
+              <a:rPr sz="1500">
+                <a:solidFill>
+                  <a:srgbClr val="22282E"/>
+                </a:solidFill>
+              </a:rPr>
+              <a:t>•  Observar y detectar estos ataques en el laboratorio con evidencia.</a:t>
+            </a:r>
+          </a:p>
+          <a:p>
+            <a:pPr>
+              <a:spcAft>
+                <a:spcPts val="600"/>
+              </a:spcAft>
+            </a:pPr>
+            <a:r>
+              <a:rPr sz="1500">
+                <a:solidFill>
+                  <a:srgbClr val="22282E"/>
+                </a:solidFill>
+              </a:rPr>
+              <a:t>•  Seleccionar defensas reales (DHCP snooping, DAI, DNSSEC) y justificar qué ataque frena cada una.</a:t>
             </a:r>
           </a:p>
         </p:txBody>
@@ -4047,7 +4529,7 @@
                   <a:srgbClr val="0B3D2E"/>
                 </a:solidFill>
               </a:rPr>
-              <a:t>📖 Definiciones y características</a:t>
+              <a:t>🧠 Explicación en profundidad</a:t>
             </a:r>
           </a:p>
         </p:txBody>
@@ -4085,82 +4567,67 @@
                   <a:srgbClr val="22282E"/>
                 </a:solidFill>
               </a:rPr>
-              <a:t>•  DNS: sistema jerárquico que traduce nombres a IPs. Clave: usa UDP/53 (y TCP para transferencias); sin DNSSEC, las respuestas no están autenticadas.</a:t>
-            </a:r>
-          </a:p>
-          <a:p>
-            <a:pPr>
-              <a:spcAft>
-                <a:spcPts val="600"/>
-              </a:spcAft>
-            </a:pPr>
-            <a:r>
-              <a:rPr sz="1500">
-                <a:solidFill>
-                  <a:srgbClr val="22282E"/>
-                </a:solidFill>
-              </a:rPr>
-              <a:t>•  Registro A / AAAA: mapea un nombre a IPv4 / IPv6. Clave: el registro más consultado.</a:t>
-            </a:r>
-          </a:p>
-          <a:p>
-            <a:pPr>
-              <a:spcAft>
-                <a:spcPts val="600"/>
-              </a:spcAft>
-            </a:pPr>
-            <a:r>
-              <a:rPr sz="1500">
-                <a:solidFill>
-                  <a:srgbClr val="22282E"/>
-                </a:solidFill>
-              </a:rPr>
-              <a:t>•  DHCP DORA: Discover, Offer, Request, Acknowledge. Clave: el cliente confía en el primer servidor que responde → servidor rogue.</a:t>
-            </a:r>
-          </a:p>
-          <a:p>
-            <a:pPr>
-              <a:spcAft>
-                <a:spcPts val="600"/>
-              </a:spcAft>
-            </a:pPr>
-            <a:r>
-              <a:rPr sz="1500">
-                <a:solidFill>
-                  <a:srgbClr val="22282E"/>
-                </a:solidFill>
-              </a:rPr>
-              <a:t>•  ARP: resuelve una IP local a su MAC mediante broadcast. Clave: sin estado ni autenticación; cualquiera puede responder.</a:t>
-            </a:r>
-          </a:p>
-          <a:p>
-            <a:pPr>
-              <a:spcAft>
-                <a:spcPts val="600"/>
-              </a:spcAft>
-            </a:pPr>
-            <a:r>
-              <a:rPr sz="1500">
-                <a:solidFill>
-                  <a:srgbClr val="22282E"/>
-                </a:solidFill>
-              </a:rPr>
-              <a:t>•  ARP spoofing: enviar respuestas ARP falsas para asociar tu MAC a la IP de la víctima/gateway. Clave: habilita MITM.</a:t>
-            </a:r>
-          </a:p>
-          <a:p>
-            <a:pPr>
-              <a:spcAft>
-                <a:spcPts val="600"/>
-              </a:spcAft>
-            </a:pPr>
-            <a:r>
-              <a:rPr sz="1500">
-                <a:solidFill>
-                  <a:srgbClr val="22282E"/>
-                </a:solidFill>
-              </a:rPr>
-              <a:t>•  DNSSEC: extensión que firma las respuestas DNS. Clave: mitiga el envenenamiento, no la confidencialidad.</a:t>
+              <a:t>•  Cuando escribes example.com, tu máquina no sabe dónde está ese servidor; solo sabe hablar con números. DNS es el sistema distribuido y jerárquico que traduce nombres legibles en direcciones IP. La…</a:t>
+            </a:r>
+          </a:p>
+          <a:p>
+            <a:pPr>
+              <a:spcAft>
+                <a:spcPts val="600"/>
+              </a:spcAft>
+            </a:pPr>
+            <a:r>
+              <a:rPr sz="1500">
+                <a:solidFill>
+                  <a:srgbClr val="22282E"/>
+                </a:solidFill>
+              </a:rPr>
+              <a:t>•  Los tipos de registro definen qué se pregunta: A (IPv4) y AAAA (IPv6) son los más consultados; CNAME crea un alias de un nombre a otro; MX indica el servidor de correo del dominio; NS delega la zona…</a:t>
+            </a:r>
+          </a:p>
+          <a:p>
+            <a:pPr>
+              <a:spcAft>
+                <a:spcPts val="600"/>
+              </a:spcAft>
+            </a:pPr>
+            <a:r>
+              <a:rPr sz="1500">
+                <a:solidFill>
+                  <a:srgbClr val="22282E"/>
+                </a:solidFill>
+              </a:rPr>
+              <a:t>•  Un equipo que se conecta a una red no tiene IP, ni sabe cuál es su gateway ni su servidor DNS. DHCP resuelve la paradoja de comunicarse sin dirección mediante un intercambio de cuatro mensajes…</a:t>
+            </a:r>
+          </a:p>
+          <a:p>
+            <a:pPr>
+              <a:spcAft>
+                <a:spcPts val="600"/>
+              </a:spcAft>
+            </a:pPr>
+            <a:r>
+              <a:rPr sz="1500">
+                <a:solidFill>
+                  <a:srgbClr val="22282E"/>
+                </a:solidFill>
+              </a:rPr>
+              <a:t>•  Dentro de un segmento Ethernet, los paquetes no se entregan por IP sino por dirección MAC. Cuando tu máquina quiere enviar algo a 10.10.10.1 y no conoce su MAC, emite una petición ARP en broadcast…</a:t>
+            </a:r>
+          </a:p>
+          <a:p>
+            <a:pPr>
+              <a:spcAft>
+                <a:spcPts val="600"/>
+              </a:spcAft>
+            </a:pPr>
+            <a:r>
+              <a:rPr sz="1500">
+                <a:solidFill>
+                  <a:srgbClr val="22282E"/>
+                </a:solidFill>
+              </a:rPr>
+              <a:t>•  Los tres protocolos fallan por la misma razón histórica: nacieron en los años 80 para redes de confianza, donde todos los nodos eran amigos. Añadir seguridad después es siempre más difícil que…</a:t>
             </a:r>
           </a:p>
         </p:txBody>
@@ -4211,7 +4678,7 @@
                   <a:srgbClr val="0B3D2E"/>
                 </a:solidFill>
               </a:rPr>
-              <a:t>🧰 Herramientas y preparación</a:t>
+              <a:t>📖 Definiciones y características</a:t>
             </a:r>
           </a:p>
         </p:txBody>
@@ -4249,7 +4716,97 @@
                   <a:srgbClr val="22282E"/>
                 </a:solidFill>
               </a:rPr>
-              <a:t>•  En Kali: dig, nslookup, arp, ip neigh, dhclient, y para prácticas ofensivas de laboratorio ettercap o bettercap y arpspoof (dsniff). Wireshark para observar. Necesitas al menos tres nodos en tu red interna: atacante, víctima y gateway/servidor.</a:t>
+              <a:t>•  DNS: sistema jerárquico y distribuido que traduce nombres a direcciones IP. Usa UDP/53 para consultas y TCP/53 para respuestas grandes y transferencias; sin DNSSEC, sus respuestas no están…</a:t>
+            </a:r>
+          </a:p>
+          <a:p>
+            <a:pPr>
+              <a:spcAft>
+                <a:spcPts val="600"/>
+              </a:spcAft>
+            </a:pPr>
+            <a:r>
+              <a:rPr sz="1500">
+                <a:solidFill>
+                  <a:srgbClr val="22282E"/>
+                </a:solidFill>
+              </a:rPr>
+              <a:t>•  Registro A / AAAA: mapea un nombre a una dirección IPv4 (A) o IPv6 (AAAA). Es el registro más consultado y el objetivo natural de una redirección maliciosa.</a:t>
+            </a:r>
+          </a:p>
+          <a:p>
+            <a:pPr>
+              <a:spcAft>
+                <a:spcPts val="600"/>
+              </a:spcAft>
+            </a:pPr>
+            <a:r>
+              <a:rPr sz="1500">
+                <a:solidFill>
+                  <a:srgbClr val="22282E"/>
+                </a:solidFill>
+              </a:rPr>
+              <a:t>•  Registro MX / NS / TXT: MX indica el servidor de correo del dominio, NS delega la zona a sus servidores autoritativos, y TXT guarda texto usado hoy para SPF, DKIM y verificaciones.</a:t>
+            </a:r>
+          </a:p>
+          <a:p>
+            <a:pPr>
+              <a:spcAft>
+                <a:spcPts val="600"/>
+              </a:spcAft>
+            </a:pPr>
+            <a:r>
+              <a:rPr sz="1500">
+                <a:solidFill>
+                  <a:srgbClr val="22282E"/>
+                </a:solidFill>
+              </a:rPr>
+              <a:t>•  DHCP DORA: secuencia Discover, Offer, Request, Acknowledge que concede una IP. El cliente confía en el primer servidor que responde, lo que abre la puerta a un servidor rogue.</a:t>
+            </a:r>
+          </a:p>
+          <a:p>
+            <a:pPr>
+              <a:spcAft>
+                <a:spcPts val="600"/>
+              </a:spcAft>
+            </a:pPr>
+            <a:r>
+              <a:rPr sz="1500">
+                <a:solidFill>
+                  <a:srgbClr val="22282E"/>
+                </a:solidFill>
+              </a:rPr>
+              <a:t>•  ARP: protocolo que resuelve una IP local a su MAC mediante broadcast. Carece de estado y de autenticación, así que cualquier nodo del segmento puede responder con datos falsos.</a:t>
+            </a:r>
+          </a:p>
+          <a:p>
+            <a:pPr>
+              <a:spcAft>
+                <a:spcPts val="600"/>
+              </a:spcAft>
+            </a:pPr>
+            <a:r>
+              <a:rPr sz="1500">
+                <a:solidFill>
+                  <a:srgbClr val="22282E"/>
+                </a:solidFill>
+              </a:rPr>
+              <a:t>•  ARP spoofing: envío de respuestas ARP falsas para asociar la MAC del atacante a la IP de la víctima o del gateway. Es el habilitador clásico del man-in-the-middle en redes conmutadas.</a:t>
+            </a:r>
+          </a:p>
+          <a:p>
+            <a:pPr>
+              <a:spcAft>
+                <a:spcPts val="600"/>
+              </a:spcAft>
+            </a:pPr>
+            <a:r>
+              <a:rPr sz="1500">
+                <a:solidFill>
+                  <a:srgbClr val="22282E"/>
+                </a:solidFill>
+              </a:rPr>
+              <a:t>•  DHCP rogue: servidor DHCP no autorizado que entrega configuración maliciosa (gateway y DNS controlados por el atacante) para interceptar el tráfico de las víctimas.</a:t>
             </a:r>
           </a:p>
         </p:txBody>
@@ -4300,7 +4857,7 @@
                   <a:srgbClr val="0B3D2E"/>
                 </a:solidFill>
               </a:rPr>
-              <a:t>🧪 Laboratorio guiado</a:t>
+              <a:t>📔 Glosario</a:t>
             </a:r>
           </a:p>
         </p:txBody>
@@ -4338,97 +4895,97 @@
                   <a:srgbClr val="22282E"/>
                 </a:solidFill>
               </a:rPr>
-              <a:t>•  Consultas DNS:</a:t>
-            </a:r>
-          </a:p>
-          <a:p>
-            <a:pPr>
-              <a:spcAft>
-                <a:spcPts val="600"/>
-              </a:spcAft>
-            </a:pPr>
-            <a:r>
-              <a:rPr sz="1500">
-                <a:solidFill>
-                  <a:srgbClr val="22282E"/>
-                </a:solidFill>
-              </a:rPr>
-              <a:t>•  dig A example.com +short</a:t>
-            </a:r>
-          </a:p>
-          <a:p>
-            <a:pPr>
-              <a:spcAft>
-                <a:spcPts val="600"/>
-              </a:spcAft>
-            </a:pPr>
-            <a:r>
-              <a:rPr sz="1500">
-                <a:solidFill>
-                  <a:srgbClr val="22282E"/>
-                </a:solidFill>
-              </a:rPr>
-              <a:t>•  dig MX example.com</a:t>
-            </a:r>
-          </a:p>
-          <a:p>
-            <a:pPr>
-              <a:spcAft>
-                <a:spcPts val="600"/>
-              </a:spcAft>
-            </a:pPr>
-            <a:r>
-              <a:rPr sz="1500">
-                <a:solidFill>
-                  <a:srgbClr val="22282E"/>
-                </a:solidFill>
-              </a:rPr>
-              <a:t>•  dig +trace example.com   # observa la resolución jerárquica</a:t>
-            </a:r>
-          </a:p>
-          <a:p>
-            <a:pPr>
-              <a:spcAft>
-                <a:spcPts val="600"/>
-              </a:spcAft>
-            </a:pPr>
-            <a:r>
-              <a:rPr sz="1500">
-                <a:solidFill>
-                  <a:srgbClr val="22282E"/>
-                </a:solidFill>
-              </a:rPr>
-              <a:t>•  Ver la caché ARP de tu equipo:</a:t>
-            </a:r>
-          </a:p>
-          <a:p>
-            <a:pPr>
-              <a:spcAft>
-                <a:spcPts val="600"/>
-              </a:spcAft>
-            </a:pPr>
-            <a:r>
-              <a:rPr sz="1500">
-                <a:solidFill>
-                  <a:srgbClr val="22282E"/>
-                </a:solidFill>
-              </a:rPr>
-              <a:t>•  ip neigh show</a:t>
-            </a:r>
-          </a:p>
-          <a:p>
-            <a:pPr>
-              <a:spcAft>
-                <a:spcPts val="600"/>
-              </a:spcAft>
-            </a:pPr>
-            <a:r>
-              <a:rPr sz="1500">
-                <a:solidFill>
-                  <a:srgbClr val="22282E"/>
-                </a:solidFill>
-              </a:rPr>
-              <a:t>•  Anota la MAC del gateway.</a:t>
+              <a:t>•  Término — Definición concisa</a:t>
+            </a:r>
+          </a:p>
+          <a:p>
+            <a:pPr>
+              <a:spcAft>
+                <a:spcPts val="600"/>
+              </a:spcAft>
+            </a:pPr>
+            <a:r>
+              <a:rPr sz="1500">
+                <a:solidFill>
+                  <a:srgbClr val="22282E"/>
+                </a:solidFill>
+              </a:rPr>
+              <a:t>•  DNS — Servicio que traduce nombres de dominio a direcciones IP.</a:t>
+            </a:r>
+          </a:p>
+          <a:p>
+            <a:pPr>
+              <a:spcAft>
+                <a:spcPts val="600"/>
+              </a:spcAft>
+            </a:pPr>
+            <a:r>
+              <a:rPr sz="1500">
+                <a:solidFill>
+                  <a:srgbClr val="22282E"/>
+                </a:solidFill>
+              </a:rPr>
+              <a:t>•  Resolver — Servidor recursivo que resuelve consultas en nombre del cliente.</a:t>
+            </a:r>
+          </a:p>
+          <a:p>
+            <a:pPr>
+              <a:spcAft>
+                <a:spcPts val="600"/>
+              </a:spcAft>
+            </a:pPr>
+            <a:r>
+              <a:rPr sz="1500">
+                <a:solidFill>
+                  <a:srgbClr val="22282E"/>
+                </a:solidFill>
+              </a:rPr>
+              <a:t>•  Autoritativo — Servidor que posee los datos oficiales de una zona DNS.</a:t>
+            </a:r>
+          </a:p>
+          <a:p>
+            <a:pPr>
+              <a:spcAft>
+                <a:spcPts val="600"/>
+              </a:spcAft>
+            </a:pPr>
+            <a:r>
+              <a:rPr sz="1500">
+                <a:solidFill>
+                  <a:srgbClr val="22282E"/>
+                </a:solidFill>
+              </a:rPr>
+              <a:t>•  TTL (DNS) — Tiempo que una respuesta puede permanecer en caché.</a:t>
+            </a:r>
+          </a:p>
+          <a:p>
+            <a:pPr>
+              <a:spcAft>
+                <a:spcPts val="600"/>
+              </a:spcAft>
+            </a:pPr>
+            <a:r>
+              <a:rPr sz="1500">
+                <a:solidFill>
+                  <a:srgbClr val="22282E"/>
+                </a:solidFill>
+              </a:rPr>
+              <a:t>•  Registro A — Mapeo de nombre a dirección IPv4.</a:t>
+            </a:r>
+          </a:p>
+          <a:p>
+            <a:pPr>
+              <a:spcAft>
+                <a:spcPts val="600"/>
+              </a:spcAft>
+            </a:pPr>
+            <a:r>
+              <a:rPr sz="1500">
+                <a:solidFill>
+                  <a:srgbClr val="22282E"/>
+                </a:solidFill>
+              </a:rPr>
+              <a:t>•  CNAME — Alias que apunta un nombre a otro nombre canónico.</a:t>
             </a:r>
           </a:p>
         </p:txBody>
@@ -4479,7 +5036,7 @@
                   <a:srgbClr val="0B3D2E"/>
                 </a:solidFill>
               </a:rPr>
-              <a:t>✍️ Ejercicios</a:t>
+              <a:t>🧰 Herramientas y preparación</a:t>
             </a:r>
           </a:p>
         </p:txBody>
@@ -4517,82 +5074,7 @@
                   <a:srgbClr val="22282E"/>
                 </a:solidFill>
               </a:rPr>
-              <a:t>•  Explica paso a paso qué ocurre desde que escribes un dominio hasta que recibes la IP.</a:t>
-            </a:r>
-          </a:p>
-          <a:p>
-            <a:pPr>
-              <a:spcAft>
-                <a:spcPts val="600"/>
-              </a:spcAft>
-            </a:pPr>
-            <a:r>
-              <a:rPr sz="1500">
-                <a:solidFill>
-                  <a:srgbClr val="22282E"/>
-                </a:solidFill>
-              </a:rPr>
-              <a:t>•  Da un ejemplo de uso de cada registro: A, MX, TXT, CNAME, NS.</a:t>
-            </a:r>
-          </a:p>
-          <a:p>
-            <a:pPr>
-              <a:spcAft>
-                <a:spcPts val="600"/>
-              </a:spcAft>
-            </a:pPr>
-            <a:r>
-              <a:rPr sz="1500">
-                <a:solidFill>
-                  <a:srgbClr val="22282E"/>
-                </a:solidFill>
-              </a:rPr>
-              <a:t>•  Describe cómo un servidor DHCP rogue puede convertirse en gateway de las víctimas.</a:t>
-            </a:r>
-          </a:p>
-          <a:p>
-            <a:pPr>
-              <a:spcAft>
-                <a:spcPts val="600"/>
-              </a:spcAft>
-            </a:pPr>
-            <a:r>
-              <a:rPr sz="1500">
-                <a:solidFill>
-                  <a:srgbClr val="22282E"/>
-                </a:solidFill>
-              </a:rPr>
-              <a:t>•  ¿Por qué ARP es tan fácil de falsificar? ¿Qué le falta al protocolo?</a:t>
-            </a:r>
-          </a:p>
-          <a:p>
-            <a:pPr>
-              <a:spcAft>
-                <a:spcPts val="600"/>
-              </a:spcAft>
-            </a:pPr>
-            <a:r>
-              <a:rPr sz="1500">
-                <a:solidFill>
-                  <a:srgbClr val="22282E"/>
-                </a:solidFill>
-              </a:rPr>
-              <a:t>•  Investiga qué son DHCP snooping y Dynamic ARP Inspection y qué ataque frena cada uno.</a:t>
-            </a:r>
-          </a:p>
-          <a:p>
-            <a:pPr>
-              <a:spcAft>
-                <a:spcPts val="600"/>
-              </a:spcAft>
-            </a:pPr>
-            <a:r>
-              <a:rPr sz="1500">
-                <a:solidFill>
-                  <a:srgbClr val="22282E"/>
-                </a:solidFill>
-              </a:rPr>
-              <a:t>•  Explica qué protege DNSSEC y qué no protege (pista: confidencialidad).</a:t>
+              <a:t>•  En Kali dispones de dig y nslookup para consultar DNS, arp e ip neigh para inspeccionar la caché ARP, y dhclient para renovar concesiones DHCP. Para las prácticas ofensivas de laboratorio usarás…</a:t>
             </a:r>
           </a:p>
         </p:txBody>
@@ -4643,7 +5125,7 @@
                   <a:srgbClr val="0B3D2E"/>
                 </a:solidFill>
               </a:rPr>
-              <a:t>📝 Reto verificable</a:t>
+              <a:t>🧪 Laboratorio guiado</a:t>
             </a:r>
           </a:p>
         </p:txBody>
@@ -4681,22 +5163,82 @@
                   <a:srgbClr val="22282E"/>
                 </a:solidFill>
               </a:rPr>
-              <a:t>•  Monta en tu laboratorio un ataque de ARP spoofing entre dos VMs y demuéstralo con evidencia: captura la tabla ARP de la víctima antes y después, y muestra en Wireshark tráfico de la víctima pasando por el atacante. Después, describe una defensa que lo habría impedido.</a:t>
-            </a:r>
-          </a:p>
-          <a:p>
-            <a:pPr>
-              <a:spcAft>
-                <a:spcPts val="600"/>
-              </a:spcAft>
-            </a:pPr>
-            <a:r>
-              <a:rPr sz="1500">
-                <a:solidFill>
-                  <a:srgbClr val="22282E"/>
-                </a:solidFill>
-              </a:rPr>
-              <a:t>•  Criterio de aceptación: la tabla ARP de la víctima muestra la MAC del atacante asociada a la IP del gateway tras el ataque, y hay una captura que evidencia el tráfico interceptado. La sección de defensa nombra un control real (DAI, ARP estático) y explica por qué funciona.</a:t>
+              <a:t>•  Consultas DNS. Observa la resolución jerárquica y distintos registros:</a:t>
+            </a:r>
+          </a:p>
+          <a:p>
+            <a:pPr>
+              <a:spcAft>
+                <a:spcPts val="600"/>
+              </a:spcAft>
+            </a:pPr>
+            <a:r>
+              <a:rPr sz="1500">
+                <a:solidFill>
+                  <a:srgbClr val="22282E"/>
+                </a:solidFill>
+              </a:rPr>
+              <a:t>•  Ver la caché ARP de tu equipo y anotar la MAC legítima del gateway:</a:t>
+            </a:r>
+          </a:p>
+          <a:p>
+            <a:pPr>
+              <a:spcAft>
+                <a:spcPts val="600"/>
+              </a:spcAft>
+            </a:pPr>
+            <a:r>
+              <a:rPr sz="1500">
+                <a:solidFill>
+                  <a:srgbClr val="22282E"/>
+                </a:solidFill>
+              </a:rPr>
+              <a:t>•  Observar DHCP. Captura mientras renuevas la concesión en la VM e identifica los cuatro mensajes DORA:</a:t>
+            </a:r>
+          </a:p>
+          <a:p>
+            <a:pPr>
+              <a:spcAft>
+                <a:spcPts val="600"/>
+              </a:spcAft>
+            </a:pPr>
+            <a:r>
+              <a:rPr sz="1500">
+                <a:solidFill>
+                  <a:srgbClr val="22282E"/>
+                </a:solidFill>
+              </a:rPr>
+              <a:t>•  ARP spoofing controlado (solo laboratorio). Habilita el reenvío y envenena entre víctima y gateway:</a:t>
+            </a:r>
+          </a:p>
+          <a:p>
+            <a:pPr>
+              <a:spcAft>
+                <a:spcPts val="600"/>
+              </a:spcAft>
+            </a:pPr>
+            <a:r>
+              <a:rPr sz="1500">
+                <a:solidFill>
+                  <a:srgbClr val="22282E"/>
+                </a:solidFill>
+              </a:rPr>
+              <a:t>•  Verifica el MITM. En la víctima, ip neigh mostrará ahora la MAC del atacante asociada a la IP del gateway. Captura su tráfico en Wireshark desde el atacante.</a:t>
+            </a:r>
+          </a:p>
+          <a:p>
+            <a:pPr>
+              <a:spcAft>
+                <a:spcPts val="600"/>
+              </a:spcAft>
+            </a:pPr>
+            <a:r>
+              <a:rPr sz="1500">
+                <a:solidFill>
+                  <a:srgbClr val="22282E"/>
+                </a:solidFill>
+              </a:rPr>
+              <a:t>•  Detección. En la víctima, observa entradas ARP duplicadas o que cambian de MAC: esa inconsistencia es la firma del ataque.</a:t>
             </a:r>
           </a:p>
         </p:txBody>
